--- a/logo.pptx
+++ b/logo.pptx
@@ -6,6 +6,7 @@
   </p:sldMasterIdLst>
   <p:sldIdLst>
     <p:sldId id="256" r:id="rId2"/>
+    <p:sldId id="257" r:id="rId3"/>
   </p:sldIdLst>
   <p:sldSz cx="12192000" cy="6858000"/>
   <p:notesSz cx="6858000" cy="9144000"/>
@@ -104,6 +105,11 @@
       </a:defRPr>
     </a:lvl9pPr>
   </p:defaultTextStyle>
+  <p:extLst>
+    <p:ext uri="{EFAFB233-063F-42B5-8137-9DF3F51BA10A}">
+      <p15:sldGuideLst xmlns:p15="http://schemas.microsoft.com/office/powerpoint/2012/main"/>
+    </p:ext>
+  </p:extLst>
 </p:presentation>
 </file>
 
@@ -113,6 +119,66 @@
     <p1510:client id="{454A10BE-C021-F04C-8006-266134D92D80}" v="2" dt="2022-11-05T11:08:31.356"/>
   </p1510:revLst>
 </p1510:revInfo>
+</file>
+
+<file path=ppt/changesInfos/changesInfo1.xml><?xml version="1.0" encoding="utf-8"?>
+<pc:chgInfo xmlns:a="http://schemas.openxmlformats.org/drawingml/2006/main" xmlns:r="http://schemas.openxmlformats.org/officeDocument/2006/relationships" xmlns:ac="http://schemas.microsoft.com/office/drawing/2013/main/command" xmlns:pc="http://schemas.microsoft.com/office/powerpoint/2013/main/command">
+  <pc:docChgLst>
+    <pc:chgData name="Daryanto, Ahmad" userId="61940c2a-8427-4576-9f17-0c8fab086415" providerId="ADAL" clId="{454A10BE-C021-F04C-8006-266134D92D80}"/>
+    <pc:docChg chg="undo custSel addSld modSld">
+      <pc:chgData name="Daryanto, Ahmad" userId="61940c2a-8427-4576-9f17-0c8fab086415" providerId="ADAL" clId="{454A10BE-C021-F04C-8006-266134D92D80}" dt="2022-11-05T12:43:04.223" v="8" actId="207"/>
+      <pc:docMkLst>
+        <pc:docMk/>
+      </pc:docMkLst>
+      <pc:sldChg chg="modSp mod">
+        <pc:chgData name="Daryanto, Ahmad" userId="61940c2a-8427-4576-9f17-0c8fab086415" providerId="ADAL" clId="{454A10BE-C021-F04C-8006-266134D92D80}" dt="2022-11-05T12:41:31.198" v="1" actId="20577"/>
+        <pc:sldMkLst>
+          <pc:docMk/>
+          <pc:sldMk cId="1797249142" sldId="256"/>
+        </pc:sldMkLst>
+        <pc:spChg chg="mod">
+          <ac:chgData name="Daryanto, Ahmad" userId="61940c2a-8427-4576-9f17-0c8fab086415" providerId="ADAL" clId="{454A10BE-C021-F04C-8006-266134D92D80}" dt="2022-11-05T12:41:31.198" v="1" actId="20577"/>
+          <ac:spMkLst>
+            <pc:docMk/>
+            <pc:sldMk cId="1797249142" sldId="256"/>
+            <ac:spMk id="5" creationId="{BB78DC23-7FAB-DE5D-237A-7A78532961AB}"/>
+          </ac:spMkLst>
+        </pc:spChg>
+      </pc:sldChg>
+      <pc:sldChg chg="delSp modSp add mod">
+        <pc:chgData name="Daryanto, Ahmad" userId="61940c2a-8427-4576-9f17-0c8fab086415" providerId="ADAL" clId="{454A10BE-C021-F04C-8006-266134D92D80}" dt="2022-11-05T12:43:04.223" v="8" actId="207"/>
+        <pc:sldMkLst>
+          <pc:docMk/>
+          <pc:sldMk cId="3869677343" sldId="257"/>
+        </pc:sldMkLst>
+        <pc:spChg chg="del topLvl">
+          <ac:chgData name="Daryanto, Ahmad" userId="61940c2a-8427-4576-9f17-0c8fab086415" providerId="ADAL" clId="{454A10BE-C021-F04C-8006-266134D92D80}" dt="2022-11-05T12:41:46.556" v="4" actId="478"/>
+          <ac:spMkLst>
+            <pc:docMk/>
+            <pc:sldMk cId="3869677343" sldId="257"/>
+            <ac:spMk id="4" creationId="{F3EC5F48-A8F1-BB37-52B9-C17D6D65C869}"/>
+          </ac:spMkLst>
+        </pc:spChg>
+        <pc:spChg chg="mod topLvl">
+          <ac:chgData name="Daryanto, Ahmad" userId="61940c2a-8427-4576-9f17-0c8fab086415" providerId="ADAL" clId="{454A10BE-C021-F04C-8006-266134D92D80}" dt="2022-11-05T12:43:04.223" v="8" actId="207"/>
+          <ac:spMkLst>
+            <pc:docMk/>
+            <pc:sldMk cId="3869677343" sldId="257"/>
+            <ac:spMk id="5" creationId="{BB78DC23-7FAB-DE5D-237A-7A78532961AB}"/>
+          </ac:spMkLst>
+        </pc:spChg>
+        <pc:grpChg chg="del">
+          <ac:chgData name="Daryanto, Ahmad" userId="61940c2a-8427-4576-9f17-0c8fab086415" providerId="ADAL" clId="{454A10BE-C021-F04C-8006-266134D92D80}" dt="2022-11-05T12:41:46.556" v="4" actId="478"/>
+          <ac:grpSpMkLst>
+            <pc:docMk/>
+            <pc:sldMk cId="3869677343" sldId="257"/>
+            <ac:grpSpMk id="6" creationId="{13AD0A83-5E6B-9F76-272F-0D604D87DAA3}"/>
+          </ac:grpSpMkLst>
+        </pc:grpChg>
+      </pc:sldChg>
+    </pc:docChg>
+  </pc:docChgLst>
+</pc:chgInfo>
 </file>
 
 <file path=ppt/slideLayouts/slideLayout1.xml><?xml version="1.0" encoding="utf-8"?>
@@ -3469,7 +3535,7 @@
             <a:p>
               <a:pPr algn="ctr"/>
               <a:r>
-                <a:rPr lang="en-GB" sz="4800" b="0" cap="none" spc="0" dirty="0">
+                <a:rPr lang="en-GB" sz="4800" b="0" cap="none" spc="0" dirty="0" err="1">
                   <a:ln w="0"/>
                   <a:solidFill>
                     <a:schemeClr val="accent1"/>
@@ -3486,6 +3552,21 @@
                 </a:rPr>
                 <a:t>umeracy</a:t>
               </a:r>
+              <a:endParaRPr lang="en-GB" sz="4800" b="0" cap="none" spc="0" dirty="0">
+                <a:ln w="0"/>
+                <a:solidFill>
+                  <a:schemeClr val="accent1"/>
+                </a:solidFill>
+                <a:effectLst>
+                  <a:outerShdw blurRad="38100" dist="25400" dir="5400000" algn="ctr" rotWithShape="0">
+                    <a:srgbClr val="6E747A">
+                      <a:alpha val="43000"/>
+                    </a:srgbClr>
+                  </a:outerShdw>
+                </a:effectLst>
+                <a:latin typeface="Apple Chancery" panose="03020702040506060504" pitchFamily="66" charset="-79"/>
+                <a:cs typeface="Apple Chancery" panose="03020702040506060504" pitchFamily="66" charset="-79"/>
+              </a:endParaRPr>
             </a:p>
           </p:txBody>
         </p:sp>
@@ -3494,6 +3575,88 @@
     <p:extLst>
       <p:ext uri="{BB962C8B-B14F-4D97-AF65-F5344CB8AC3E}">
         <p14:creationId xmlns:p14="http://schemas.microsoft.com/office/powerpoint/2010/main" val="1797249142"/>
+      </p:ext>
+    </p:extLst>
+  </p:cSld>
+  <p:clrMapOvr>
+    <a:masterClrMapping/>
+  </p:clrMapOvr>
+</p:sld>
+</file>
+
+<file path=ppt/slides/slide2.xml><?xml version="1.0" encoding="utf-8"?>
+<p:sld xmlns:a="http://schemas.openxmlformats.org/drawingml/2006/main" xmlns:r="http://schemas.openxmlformats.org/officeDocument/2006/relationships" xmlns:p="http://schemas.openxmlformats.org/presentationml/2006/main">
+  <p:cSld>
+    <p:spTree>
+      <p:nvGrpSpPr>
+        <p:cNvPr id="1" name=""/>
+        <p:cNvGrpSpPr/>
+        <p:nvPr/>
+      </p:nvGrpSpPr>
+      <p:grpSpPr>
+        <a:xfrm>
+          <a:off x="0" y="0"/>
+          <a:ext cx="0" cy="0"/>
+          <a:chOff x="0" y="0"/>
+          <a:chExt cx="0" cy="0"/>
+        </a:xfrm>
+      </p:grpSpPr>
+      <p:sp>
+        <p:nvSpPr>
+          <p:cNvPr id="5" name="Rectangle 4">
+            <a:extLst>
+              <a:ext uri="{FF2B5EF4-FFF2-40B4-BE49-F238E27FC236}">
+                <a16:creationId xmlns:a16="http://schemas.microsoft.com/office/drawing/2014/main" id="{BB78DC23-7FAB-DE5D-237A-7A78532961AB}"/>
+              </a:ext>
+            </a:extLst>
+          </p:cNvPr>
+          <p:cNvSpPr/>
+          <p:nvPr/>
+        </p:nvSpPr>
+        <p:spPr>
+          <a:xfrm>
+            <a:off x="6623361" y="2648976"/>
+            <a:ext cx="2929007" cy="830997"/>
+          </a:xfrm>
+          <a:prstGeom prst="rect">
+            <a:avLst/>
+          </a:prstGeom>
+          <a:solidFill>
+            <a:srgbClr val="C00000"/>
+          </a:solidFill>
+        </p:spPr>
+        <p:txBody>
+          <a:bodyPr wrap="none" lIns="91440" tIns="45720" rIns="91440" bIns="45720">
+            <a:spAutoFit/>
+          </a:bodyPr>
+          <a:lstStyle/>
+          <a:p>
+            <a:pPr algn="ctr"/>
+            <a:r>
+              <a:rPr lang="en-GB" sz="4800" b="0" cap="none" spc="0" dirty="0">
+                <a:ln w="0"/>
+                <a:solidFill>
+                  <a:schemeClr val="bg1"/>
+                </a:solidFill>
+                <a:effectLst>
+                  <a:outerShdw blurRad="38100" dist="25400" dir="5400000" algn="ctr" rotWithShape="0">
+                    <a:srgbClr val="6E747A">
+                      <a:alpha val="43000"/>
+                    </a:srgbClr>
+                  </a:outerShdw>
+                </a:effectLst>
+                <a:latin typeface="Apple Chancery" panose="03020702040506060504" pitchFamily="66" charset="-79"/>
+                <a:cs typeface="Apple Chancery" panose="03020702040506060504" pitchFamily="66" charset="-79"/>
+              </a:rPr>
+              <a:t>Numeracy</a:t>
+            </a:r>
+          </a:p>
+        </p:txBody>
+      </p:sp>
+    </p:spTree>
+    <p:extLst>
+      <p:ext uri="{BB962C8B-B14F-4D97-AF65-F5344CB8AC3E}">
+        <p14:creationId xmlns:p14="http://schemas.microsoft.com/office/powerpoint/2010/main" val="3869677343"/>
       </p:ext>
     </p:extLst>
   </p:cSld>

--- a/logo.pptx
+++ b/logo.pptx
@@ -116,7 +116,7 @@
 <file path=ppt/revisionInfo.xml><?xml version="1.0" encoding="utf-8"?>
 <p1510:revInfo xmlns:a="http://schemas.openxmlformats.org/drawingml/2006/main" xmlns:r="http://schemas.openxmlformats.org/officeDocument/2006/relationships" xmlns:p1510="http://schemas.microsoft.com/office/powerpoint/2015/10/main">
   <p1510:revLst>
-    <p1510:client id="{454A10BE-C021-F04C-8006-266134D92D80}" v="2" dt="2022-11-05T11:08:31.356"/>
+    <p1510:client id="{454A10BE-C021-F04C-8006-266134D92D80}" v="9" dt="2022-11-05T12:46:32.955"/>
   </p1510:revLst>
 </p1510:revInfo>
 </file>
@@ -126,7 +126,7 @@
   <pc:docChgLst>
     <pc:chgData name="Daryanto, Ahmad" userId="61940c2a-8427-4576-9f17-0c8fab086415" providerId="ADAL" clId="{454A10BE-C021-F04C-8006-266134D92D80}"/>
     <pc:docChg chg="undo custSel addSld modSld">
-      <pc:chgData name="Daryanto, Ahmad" userId="61940c2a-8427-4576-9f17-0c8fab086415" providerId="ADAL" clId="{454A10BE-C021-F04C-8006-266134D92D80}" dt="2022-11-05T12:43:04.223" v="8" actId="207"/>
+      <pc:chgData name="Daryanto, Ahmad" userId="61940c2a-8427-4576-9f17-0c8fab086415" providerId="ADAL" clId="{454A10BE-C021-F04C-8006-266134D92D80}" dt="2022-11-05T12:48:58.597" v="45" actId="1076"/>
       <pc:docMkLst>
         <pc:docMk/>
       </pc:docMkLst>
@@ -145,12 +145,36 @@
           </ac:spMkLst>
         </pc:spChg>
       </pc:sldChg>
-      <pc:sldChg chg="delSp modSp add mod">
-        <pc:chgData name="Daryanto, Ahmad" userId="61940c2a-8427-4576-9f17-0c8fab086415" providerId="ADAL" clId="{454A10BE-C021-F04C-8006-266134D92D80}" dt="2022-11-05T12:43:04.223" v="8" actId="207"/>
+      <pc:sldChg chg="addSp delSp modSp add mod">
+        <pc:chgData name="Daryanto, Ahmad" userId="61940c2a-8427-4576-9f17-0c8fab086415" providerId="ADAL" clId="{454A10BE-C021-F04C-8006-266134D92D80}" dt="2022-11-05T12:48:58.597" v="45" actId="1076"/>
         <pc:sldMkLst>
           <pc:docMk/>
           <pc:sldMk cId="3869677343" sldId="257"/>
         </pc:sldMkLst>
+        <pc:spChg chg="add mod">
+          <ac:chgData name="Daryanto, Ahmad" userId="61940c2a-8427-4576-9f17-0c8fab086415" providerId="ADAL" clId="{454A10BE-C021-F04C-8006-266134D92D80}" dt="2022-11-05T12:45:42.126" v="11"/>
+          <ac:spMkLst>
+            <pc:docMk/>
+            <pc:sldMk cId="3869677343" sldId="257"/>
+            <ac:spMk id="2" creationId="{940D8ACC-0FB8-2528-14F9-6BCD566D7970}"/>
+          </ac:spMkLst>
+        </pc:spChg>
+        <pc:spChg chg="add del mod">
+          <ac:chgData name="Daryanto, Ahmad" userId="61940c2a-8427-4576-9f17-0c8fab086415" providerId="ADAL" clId="{454A10BE-C021-F04C-8006-266134D92D80}" dt="2022-11-05T12:45:46.885" v="13"/>
+          <ac:spMkLst>
+            <pc:docMk/>
+            <pc:sldMk cId="3869677343" sldId="257"/>
+            <ac:spMk id="3" creationId="{79D9D95D-0BA4-F322-9D0C-A19DF64DC1C1}"/>
+          </ac:spMkLst>
+        </pc:spChg>
+        <pc:spChg chg="add mod">
+          <ac:chgData name="Daryanto, Ahmad" userId="61940c2a-8427-4576-9f17-0c8fab086415" providerId="ADAL" clId="{454A10BE-C021-F04C-8006-266134D92D80}" dt="2022-11-05T12:46:03.079" v="16" actId="207"/>
+          <ac:spMkLst>
+            <pc:docMk/>
+            <pc:sldMk cId="3869677343" sldId="257"/>
+            <ac:spMk id="4" creationId="{73096A0E-487C-8A2D-058D-59A182B23714}"/>
+          </ac:spMkLst>
+        </pc:spChg>
         <pc:spChg chg="del topLvl">
           <ac:chgData name="Daryanto, Ahmad" userId="61940c2a-8427-4576-9f17-0c8fab086415" providerId="ADAL" clId="{454A10BE-C021-F04C-8006-266134D92D80}" dt="2022-11-05T12:41:46.556" v="4" actId="478"/>
           <ac:spMkLst>
@@ -167,12 +191,52 @@
             <ac:spMk id="5" creationId="{BB78DC23-7FAB-DE5D-237A-7A78532961AB}"/>
           </ac:spMkLst>
         </pc:spChg>
+        <pc:spChg chg="add mod">
+          <ac:chgData name="Daryanto, Ahmad" userId="61940c2a-8427-4576-9f17-0c8fab086415" providerId="ADAL" clId="{454A10BE-C021-F04C-8006-266134D92D80}" dt="2022-11-05T12:46:15.824" v="19" actId="207"/>
+          <ac:spMkLst>
+            <pc:docMk/>
+            <pc:sldMk cId="3869677343" sldId="257"/>
+            <ac:spMk id="6" creationId="{BCD15FBC-EC5C-565D-1139-4846A036AD70}"/>
+          </ac:spMkLst>
+        </pc:spChg>
+        <pc:spChg chg="add mod">
+          <ac:chgData name="Daryanto, Ahmad" userId="61940c2a-8427-4576-9f17-0c8fab086415" providerId="ADAL" clId="{454A10BE-C021-F04C-8006-266134D92D80}" dt="2022-11-05T12:48:58.597" v="45" actId="1076"/>
+          <ac:spMkLst>
+            <pc:docMk/>
+            <pc:sldMk cId="3869677343" sldId="257"/>
+            <ac:spMk id="7" creationId="{EA0FFEE8-BAE5-EDFD-0BAE-ACEED8E5DE62}"/>
+          </ac:spMkLst>
+        </pc:spChg>
+        <pc:spChg chg="add del mod">
+          <ac:chgData name="Daryanto, Ahmad" userId="61940c2a-8427-4576-9f17-0c8fab086415" providerId="ADAL" clId="{454A10BE-C021-F04C-8006-266134D92D80}" dt="2022-11-05T12:46:35.748" v="30" actId="478"/>
+          <ac:spMkLst>
+            <pc:docMk/>
+            <pc:sldMk cId="3869677343" sldId="257"/>
+            <ac:spMk id="8" creationId="{AB30D067-565B-D662-E420-D8AF26E8D17F}"/>
+          </ac:spMkLst>
+        </pc:spChg>
         <pc:grpChg chg="del">
           <ac:chgData name="Daryanto, Ahmad" userId="61940c2a-8427-4576-9f17-0c8fab086415" providerId="ADAL" clId="{454A10BE-C021-F04C-8006-266134D92D80}" dt="2022-11-05T12:41:46.556" v="4" actId="478"/>
           <ac:grpSpMkLst>
             <pc:docMk/>
             <pc:sldMk cId="3869677343" sldId="257"/>
             <ac:grpSpMk id="6" creationId="{13AD0A83-5E6B-9F76-272F-0D604D87DAA3}"/>
+          </ac:grpSpMkLst>
+        </pc:grpChg>
+        <pc:grpChg chg="add mod">
+          <ac:chgData name="Daryanto, Ahmad" userId="61940c2a-8427-4576-9f17-0c8fab086415" providerId="ADAL" clId="{454A10BE-C021-F04C-8006-266134D92D80}" dt="2022-11-05T12:47:33.513" v="42" actId="14100"/>
+          <ac:grpSpMkLst>
+            <pc:docMk/>
+            <pc:sldMk cId="3869677343" sldId="257"/>
+            <ac:grpSpMk id="9" creationId="{449A0B94-8269-D88C-E50C-61A9CE43BF41}"/>
+          </ac:grpSpMkLst>
+        </pc:grpChg>
+        <pc:grpChg chg="add">
+          <ac:chgData name="Daryanto, Ahmad" userId="61940c2a-8427-4576-9f17-0c8fab086415" providerId="ADAL" clId="{454A10BE-C021-F04C-8006-266134D92D80}" dt="2022-11-05T12:47:59.534" v="44" actId="164"/>
+          <ac:grpSpMkLst>
+            <pc:docMk/>
+            <pc:sldMk cId="3869677343" sldId="257"/>
+            <ac:grpSpMk id="10" creationId="{D44510EE-1026-BD99-DA37-3AAEB1FBB98A}"/>
           </ac:grpSpMkLst>
         </pc:grpChg>
       </pc:sldChg>
@@ -3653,6 +3717,199 @@
           </a:p>
         </p:txBody>
       </p:sp>
+      <p:sp>
+        <p:nvSpPr>
+          <p:cNvPr id="2" name="TextBox 1">
+            <a:extLst>
+              <a:ext uri="{FF2B5EF4-FFF2-40B4-BE49-F238E27FC236}">
+                <a16:creationId xmlns:a16="http://schemas.microsoft.com/office/drawing/2014/main" id="{940D8ACC-0FB8-2528-14F9-6BCD566D7970}"/>
+              </a:ext>
+            </a:extLst>
+          </p:cNvPr>
+          <p:cNvSpPr txBox="1"/>
+          <p:nvPr/>
+        </p:nvSpPr>
+        <p:spPr>
+          <a:xfrm>
+            <a:off x="6623361" y="4088524"/>
+            <a:ext cx="1301439" cy="588579"/>
+          </a:xfrm>
+          <a:prstGeom prst="rect">
+            <a:avLst/>
+          </a:prstGeom>
+          <a:noFill/>
+        </p:spPr>
+        <p:txBody>
+          <a:bodyPr wrap="square" rtlCol="0">
+            <a:spAutoFit/>
+          </a:bodyPr>
+          <a:lstStyle/>
+          <a:p>
+            <a:endParaRPr lang="en-US" dirty="0"/>
+          </a:p>
+        </p:txBody>
+      </p:sp>
+      <p:grpSp>
+        <p:nvGrpSpPr>
+          <p:cNvPr id="10" name="Group 9">
+            <a:extLst>
+              <a:ext uri="{FF2B5EF4-FFF2-40B4-BE49-F238E27FC236}">
+                <a16:creationId xmlns:a16="http://schemas.microsoft.com/office/drawing/2014/main" id="{D44510EE-1026-BD99-DA37-3AAEB1FBB98A}"/>
+              </a:ext>
+            </a:extLst>
+          </p:cNvPr>
+          <p:cNvGrpSpPr/>
+          <p:nvPr/>
+        </p:nvGrpSpPr>
+        <p:grpSpPr>
+          <a:xfrm>
+            <a:off x="6786425" y="4748945"/>
+            <a:ext cx="4114799" cy="897526"/>
+            <a:chOff x="6786425" y="4748945"/>
+            <a:chExt cx="4114799" cy="897526"/>
+          </a:xfrm>
+        </p:grpSpPr>
+        <p:grpSp>
+          <p:nvGrpSpPr>
+            <p:cNvPr id="9" name="Group 8">
+              <a:extLst>
+                <a:ext uri="{FF2B5EF4-FFF2-40B4-BE49-F238E27FC236}">
+                  <a16:creationId xmlns:a16="http://schemas.microsoft.com/office/drawing/2014/main" id="{449A0B94-8269-D88C-E50C-61A9CE43BF41}"/>
+                </a:ext>
+              </a:extLst>
+            </p:cNvPr>
+            <p:cNvGrpSpPr/>
+            <p:nvPr/>
+          </p:nvGrpSpPr>
+          <p:grpSpPr>
+            <a:xfrm>
+              <a:off x="6786425" y="4748945"/>
+              <a:ext cx="3024840" cy="830997"/>
+              <a:chOff x="6775761" y="4240923"/>
+              <a:chExt cx="2602878" cy="588580"/>
+            </a:xfrm>
+          </p:grpSpPr>
+          <p:sp>
+            <p:nvSpPr>
+              <p:cNvPr id="4" name="TextBox 3">
+                <a:extLst>
+                  <a:ext uri="{FF2B5EF4-FFF2-40B4-BE49-F238E27FC236}">
+                    <a16:creationId xmlns:a16="http://schemas.microsoft.com/office/drawing/2014/main" id="{73096A0E-487C-8A2D-058D-59A182B23714}"/>
+                  </a:ext>
+                </a:extLst>
+              </p:cNvPr>
+              <p:cNvSpPr txBox="1"/>
+              <p:nvPr/>
+            </p:nvSpPr>
+            <p:spPr>
+              <a:xfrm>
+                <a:off x="6775761" y="4240924"/>
+                <a:ext cx="1301439" cy="588579"/>
+              </a:xfrm>
+              <a:prstGeom prst="rect">
+                <a:avLst/>
+              </a:prstGeom>
+              <a:solidFill>
+                <a:srgbClr val="C00000"/>
+              </a:solidFill>
+            </p:spPr>
+            <p:txBody>
+              <a:bodyPr wrap="square" rtlCol="0">
+                <a:spAutoFit/>
+              </a:bodyPr>
+              <a:lstStyle/>
+              <a:p>
+                <a:endParaRPr lang="en-US" dirty="0"/>
+              </a:p>
+            </p:txBody>
+          </p:sp>
+          <p:sp>
+            <p:nvSpPr>
+              <p:cNvPr id="6" name="TextBox 5">
+                <a:extLst>
+                  <a:ext uri="{FF2B5EF4-FFF2-40B4-BE49-F238E27FC236}">
+                    <a16:creationId xmlns:a16="http://schemas.microsoft.com/office/drawing/2014/main" id="{BCD15FBC-EC5C-565D-1139-4846A036AD70}"/>
+                  </a:ext>
+                </a:extLst>
+              </p:cNvPr>
+              <p:cNvSpPr txBox="1"/>
+              <p:nvPr/>
+            </p:nvSpPr>
+            <p:spPr>
+              <a:xfrm>
+                <a:off x="8077200" y="4240923"/>
+                <a:ext cx="1301439" cy="588579"/>
+              </a:xfrm>
+              <a:prstGeom prst="rect">
+                <a:avLst/>
+              </a:prstGeom>
+              <a:solidFill>
+                <a:schemeClr val="bg1">
+                  <a:lumMod val="65000"/>
+                </a:schemeClr>
+              </a:solidFill>
+            </p:spPr>
+            <p:txBody>
+              <a:bodyPr wrap="square" rtlCol="0">
+                <a:spAutoFit/>
+              </a:bodyPr>
+              <a:lstStyle/>
+              <a:p>
+                <a:endParaRPr lang="en-US" dirty="0"/>
+              </a:p>
+            </p:txBody>
+          </p:sp>
+        </p:grpSp>
+        <p:sp>
+          <p:nvSpPr>
+            <p:cNvPr id="7" name="TextBox 6">
+              <a:extLst>
+                <a:ext uri="{FF2B5EF4-FFF2-40B4-BE49-F238E27FC236}">
+                  <a16:creationId xmlns:a16="http://schemas.microsoft.com/office/drawing/2014/main" id="{EA0FFEE8-BAE5-EDFD-0BAE-ACEED8E5DE62}"/>
+                </a:ext>
+              </a:extLst>
+            </p:cNvPr>
+            <p:cNvSpPr txBox="1"/>
+            <p:nvPr/>
+          </p:nvSpPr>
+          <p:spPr>
+            <a:xfrm>
+              <a:off x="6872922" y="4815474"/>
+              <a:ext cx="4028302" cy="830997"/>
+            </a:xfrm>
+            <a:prstGeom prst="rect">
+              <a:avLst/>
+            </a:prstGeom>
+            <a:noFill/>
+          </p:spPr>
+          <p:txBody>
+            <a:bodyPr wrap="square" rtlCol="0">
+              <a:spAutoFit/>
+            </a:bodyPr>
+            <a:lstStyle/>
+            <a:p>
+              <a:r>
+                <a:rPr lang="en-US" sz="4800" dirty="0">
+                  <a:ln w="0"/>
+                  <a:solidFill>
+                    <a:schemeClr val="bg1"/>
+                  </a:solidFill>
+                  <a:effectLst>
+                    <a:outerShdw blurRad="38100" dist="25400" dir="5400000" algn="ctr" rotWithShape="0">
+                      <a:srgbClr val="6E747A">
+                        <a:alpha val="43000"/>
+                      </a:srgbClr>
+                    </a:outerShdw>
+                  </a:effectLst>
+                  <a:latin typeface="Apple Chancery" panose="03020702040506060504" pitchFamily="66" charset="-79"/>
+                  <a:cs typeface="Apple Chancery" panose="03020702040506060504" pitchFamily="66" charset="-79"/>
+                </a:rPr>
+                <a:t>Numeracy</a:t>
+              </a:r>
+            </a:p>
+          </p:txBody>
+        </p:sp>
+      </p:grpSp>
     </p:spTree>
     <p:extLst>
       <p:ext uri="{BB962C8B-B14F-4D97-AF65-F5344CB8AC3E}">

--- a/logo.pptx
+++ b/logo.pptx
@@ -7,6 +7,7 @@
   <p:sldIdLst>
     <p:sldId id="256" r:id="rId2"/>
     <p:sldId id="257" r:id="rId3"/>
+    <p:sldId id="258" r:id="rId4"/>
   </p:sldIdLst>
   <p:sldSz cx="12192000" cy="6858000"/>
   <p:notesSz cx="6858000" cy="9144000"/>
@@ -394,7 +395,7 @@
           <a:p>
             <a:fld id="{70508A58-EBBD-6F4C-84C4-349B94FCD322}" type="datetimeFigureOut">
               <a:rPr lang="en-US" smtClean="0"/>
-              <a:t>11/5/22</a:t>
+              <a:t>11/9/22</a:t>
             </a:fld>
             <a:endParaRPr lang="en-US"/>
           </a:p>
@@ -594,7 +595,7 @@
           <a:p>
             <a:fld id="{70508A58-EBBD-6F4C-84C4-349B94FCD322}" type="datetimeFigureOut">
               <a:rPr lang="en-US" smtClean="0"/>
-              <a:t>11/5/22</a:t>
+              <a:t>11/9/22</a:t>
             </a:fld>
             <a:endParaRPr lang="en-US"/>
           </a:p>
@@ -804,7 +805,7 @@
           <a:p>
             <a:fld id="{70508A58-EBBD-6F4C-84C4-349B94FCD322}" type="datetimeFigureOut">
               <a:rPr lang="en-US" smtClean="0"/>
-              <a:t>11/5/22</a:t>
+              <a:t>11/9/22</a:t>
             </a:fld>
             <a:endParaRPr lang="en-US"/>
           </a:p>
@@ -1004,7 +1005,7 @@
           <a:p>
             <a:fld id="{70508A58-EBBD-6F4C-84C4-349B94FCD322}" type="datetimeFigureOut">
               <a:rPr lang="en-US" smtClean="0"/>
-              <a:t>11/5/22</a:t>
+              <a:t>11/9/22</a:t>
             </a:fld>
             <a:endParaRPr lang="en-US"/>
           </a:p>
@@ -1280,7 +1281,7 @@
           <a:p>
             <a:fld id="{70508A58-EBBD-6F4C-84C4-349B94FCD322}" type="datetimeFigureOut">
               <a:rPr lang="en-US" smtClean="0"/>
-              <a:t>11/5/22</a:t>
+              <a:t>11/9/22</a:t>
             </a:fld>
             <a:endParaRPr lang="en-US"/>
           </a:p>
@@ -1548,7 +1549,7 @@
           <a:p>
             <a:fld id="{70508A58-EBBD-6F4C-84C4-349B94FCD322}" type="datetimeFigureOut">
               <a:rPr lang="en-US" smtClean="0"/>
-              <a:t>11/5/22</a:t>
+              <a:t>11/9/22</a:t>
             </a:fld>
             <a:endParaRPr lang="en-US"/>
           </a:p>
@@ -1963,7 +1964,7 @@
           <a:p>
             <a:fld id="{70508A58-EBBD-6F4C-84C4-349B94FCD322}" type="datetimeFigureOut">
               <a:rPr lang="en-US" smtClean="0"/>
-              <a:t>11/5/22</a:t>
+              <a:t>11/9/22</a:t>
             </a:fld>
             <a:endParaRPr lang="en-US"/>
           </a:p>
@@ -2105,7 +2106,7 @@
           <a:p>
             <a:fld id="{70508A58-EBBD-6F4C-84C4-349B94FCD322}" type="datetimeFigureOut">
               <a:rPr lang="en-US" smtClean="0"/>
-              <a:t>11/5/22</a:t>
+              <a:t>11/9/22</a:t>
             </a:fld>
             <a:endParaRPr lang="en-US"/>
           </a:p>
@@ -2218,7 +2219,7 @@
           <a:p>
             <a:fld id="{70508A58-EBBD-6F4C-84C4-349B94FCD322}" type="datetimeFigureOut">
               <a:rPr lang="en-US" smtClean="0"/>
-              <a:t>11/5/22</a:t>
+              <a:t>11/9/22</a:t>
             </a:fld>
             <a:endParaRPr lang="en-US"/>
           </a:p>
@@ -2531,7 +2532,7 @@
           <a:p>
             <a:fld id="{70508A58-EBBD-6F4C-84C4-349B94FCD322}" type="datetimeFigureOut">
               <a:rPr lang="en-US" smtClean="0"/>
-              <a:t>11/5/22</a:t>
+              <a:t>11/9/22</a:t>
             </a:fld>
             <a:endParaRPr lang="en-US"/>
           </a:p>
@@ -2820,7 +2821,7 @@
           <a:p>
             <a:fld id="{70508A58-EBBD-6F4C-84C4-349B94FCD322}" type="datetimeFigureOut">
               <a:rPr lang="en-US" smtClean="0"/>
-              <a:t>11/5/22</a:t>
+              <a:t>11/9/22</a:t>
             </a:fld>
             <a:endParaRPr lang="en-US"/>
           </a:p>
@@ -3063,7 +3064,7 @@
           <a:p>
             <a:fld id="{70508A58-EBBD-6F4C-84C4-349B94FCD322}" type="datetimeFigureOut">
               <a:rPr lang="en-US" smtClean="0"/>
-              <a:t>11/5/22</a:t>
+              <a:t>11/9/22</a:t>
             </a:fld>
             <a:endParaRPr lang="en-US"/>
           </a:p>
@@ -3679,7 +3680,7 @@
         </p:nvSpPr>
         <p:spPr>
           <a:xfrm>
-            <a:off x="6623361" y="2648976"/>
+            <a:off x="667405" y="474187"/>
             <a:ext cx="2929007" cy="830997"/>
           </a:xfrm>
           <a:prstGeom prst="rect">
@@ -3751,10 +3752,10 @@
       </p:sp>
       <p:grpSp>
         <p:nvGrpSpPr>
-          <p:cNvPr id="10" name="Group 9">
-            <a:extLst>
-              <a:ext uri="{FF2B5EF4-FFF2-40B4-BE49-F238E27FC236}">
-                <a16:creationId xmlns:a16="http://schemas.microsoft.com/office/drawing/2014/main" id="{D44510EE-1026-BD99-DA37-3AAEB1FBB98A}"/>
+          <p:cNvPr id="12" name="Group 11">
+            <a:extLst>
+              <a:ext uri="{FF2B5EF4-FFF2-40B4-BE49-F238E27FC236}">
+                <a16:creationId xmlns:a16="http://schemas.microsoft.com/office/drawing/2014/main" id="{C42AEB62-7212-E0CC-1D82-910425582F60}"/>
               </a:ext>
             </a:extLst>
           </p:cNvPr>
@@ -3763,18 +3764,18 @@
         </p:nvGrpSpPr>
         <p:grpSpPr>
           <a:xfrm>
-            <a:off x="6786425" y="4748945"/>
-            <a:ext cx="4114799" cy="897526"/>
-            <a:chOff x="6786425" y="4748945"/>
-            <a:chExt cx="4114799" cy="897526"/>
+            <a:off x="6996489" y="2372492"/>
+            <a:ext cx="4114799" cy="2945565"/>
+            <a:chOff x="6996489" y="2372492"/>
+            <a:chExt cx="4114799" cy="2945565"/>
           </a:xfrm>
         </p:grpSpPr>
         <p:grpSp>
           <p:nvGrpSpPr>
-            <p:cNvPr id="9" name="Group 8">
+            <p:cNvPr id="10" name="Group 9">
               <a:extLst>
                 <a:ext uri="{FF2B5EF4-FFF2-40B4-BE49-F238E27FC236}">
-                  <a16:creationId xmlns:a16="http://schemas.microsoft.com/office/drawing/2014/main" id="{449A0B94-8269-D88C-E50C-61A9CE43BF41}"/>
+                  <a16:creationId xmlns:a16="http://schemas.microsoft.com/office/drawing/2014/main" id="{D44510EE-1026-BD99-DA37-3AAEB1FBB98A}"/>
                 </a:ext>
               </a:extLst>
             </p:cNvPr>
@@ -3783,18 +3784,109 @@
           </p:nvGrpSpPr>
           <p:grpSpPr>
             <a:xfrm>
-              <a:off x="6786425" y="4748945"/>
-              <a:ext cx="3024840" cy="830997"/>
-              <a:chOff x="6775761" y="4240923"/>
-              <a:chExt cx="2602878" cy="588580"/>
+              <a:off x="6996489" y="4420531"/>
+              <a:ext cx="4114799" cy="897526"/>
+              <a:chOff x="6786425" y="4748945"/>
+              <a:chExt cx="4114799" cy="897526"/>
             </a:xfrm>
           </p:grpSpPr>
+          <p:grpSp>
+            <p:nvGrpSpPr>
+              <p:cNvPr id="9" name="Group 8">
+                <a:extLst>
+                  <a:ext uri="{FF2B5EF4-FFF2-40B4-BE49-F238E27FC236}">
+                    <a16:creationId xmlns:a16="http://schemas.microsoft.com/office/drawing/2014/main" id="{449A0B94-8269-D88C-E50C-61A9CE43BF41}"/>
+                  </a:ext>
+                </a:extLst>
+              </p:cNvPr>
+              <p:cNvGrpSpPr/>
+              <p:nvPr/>
+            </p:nvGrpSpPr>
+            <p:grpSpPr>
+              <a:xfrm>
+                <a:off x="6786425" y="4748945"/>
+                <a:ext cx="3024840" cy="830997"/>
+                <a:chOff x="6775761" y="4240923"/>
+                <a:chExt cx="2602878" cy="588580"/>
+              </a:xfrm>
+            </p:grpSpPr>
+            <p:sp>
+              <p:nvSpPr>
+                <p:cNvPr id="4" name="TextBox 3">
+                  <a:extLst>
+                    <a:ext uri="{FF2B5EF4-FFF2-40B4-BE49-F238E27FC236}">
+                      <a16:creationId xmlns:a16="http://schemas.microsoft.com/office/drawing/2014/main" id="{73096A0E-487C-8A2D-058D-59A182B23714}"/>
+                    </a:ext>
+                  </a:extLst>
+                </p:cNvPr>
+                <p:cNvSpPr txBox="1"/>
+                <p:nvPr/>
+              </p:nvSpPr>
+              <p:spPr>
+                <a:xfrm>
+                  <a:off x="6775761" y="4240924"/>
+                  <a:ext cx="1301439" cy="588579"/>
+                </a:xfrm>
+                <a:prstGeom prst="rect">
+                  <a:avLst/>
+                </a:prstGeom>
+                <a:solidFill>
+                  <a:srgbClr val="C00000"/>
+                </a:solidFill>
+              </p:spPr>
+              <p:txBody>
+                <a:bodyPr wrap="square" rtlCol="0">
+                  <a:spAutoFit/>
+                </a:bodyPr>
+                <a:lstStyle/>
+                <a:p>
+                  <a:endParaRPr lang="en-US" dirty="0"/>
+                </a:p>
+              </p:txBody>
+            </p:sp>
+            <p:sp>
+              <p:nvSpPr>
+                <p:cNvPr id="6" name="TextBox 5">
+                  <a:extLst>
+                    <a:ext uri="{FF2B5EF4-FFF2-40B4-BE49-F238E27FC236}">
+                      <a16:creationId xmlns:a16="http://schemas.microsoft.com/office/drawing/2014/main" id="{BCD15FBC-EC5C-565D-1139-4846A036AD70}"/>
+                    </a:ext>
+                  </a:extLst>
+                </p:cNvPr>
+                <p:cNvSpPr txBox="1"/>
+                <p:nvPr/>
+              </p:nvSpPr>
+              <p:spPr>
+                <a:xfrm>
+                  <a:off x="8077200" y="4240923"/>
+                  <a:ext cx="1301439" cy="588579"/>
+                </a:xfrm>
+                <a:prstGeom prst="rect">
+                  <a:avLst/>
+                </a:prstGeom>
+                <a:solidFill>
+                  <a:schemeClr val="bg1">
+                    <a:lumMod val="65000"/>
+                  </a:schemeClr>
+                </a:solidFill>
+              </p:spPr>
+              <p:txBody>
+                <a:bodyPr wrap="square" rtlCol="0">
+                  <a:spAutoFit/>
+                </a:bodyPr>
+                <a:lstStyle/>
+                <a:p>
+                  <a:endParaRPr lang="en-US" dirty="0"/>
+                </a:p>
+              </p:txBody>
+            </p:sp>
+          </p:grpSp>
           <p:sp>
             <p:nvSpPr>
-              <p:cNvPr id="4" name="TextBox 3">
+              <p:cNvPr id="7" name="TextBox 6">
                 <a:extLst>
                   <a:ext uri="{FF2B5EF4-FFF2-40B4-BE49-F238E27FC236}">
-                    <a16:creationId xmlns:a16="http://schemas.microsoft.com/office/drawing/2014/main" id="{73096A0E-487C-8A2D-058D-59A182B23714}"/>
+                    <a16:creationId xmlns:a16="http://schemas.microsoft.com/office/drawing/2014/main" id="{EA0FFEE8-BAE5-EDFD-0BAE-ACEED8E5DE62}"/>
                   </a:ext>
                 </a:extLst>
               </p:cNvPr>
@@ -3803,15 +3895,13 @@
             </p:nvSpPr>
             <p:spPr>
               <a:xfrm>
-                <a:off x="6775761" y="4240924"/>
-                <a:ext cx="1301439" cy="588579"/>
+                <a:off x="6872922" y="4815474"/>
+                <a:ext cx="4028302" cy="830997"/>
               </a:xfrm>
               <a:prstGeom prst="rect">
                 <a:avLst/>
               </a:prstGeom>
-              <a:solidFill>
-                <a:srgbClr val="C00000"/>
-              </a:solidFill>
+              <a:noFill/>
             </p:spPr>
             <p:txBody>
               <a:bodyPr wrap="square" rtlCol="0">
@@ -3819,47 +3909,140 @@
               </a:bodyPr>
               <a:lstStyle/>
               <a:p>
-                <a:endParaRPr lang="en-US" dirty="0"/>
-              </a:p>
-            </p:txBody>
-          </p:sp>
-          <p:sp>
-            <p:nvSpPr>
-              <p:cNvPr id="6" name="TextBox 5">
-                <a:extLst>
-                  <a:ext uri="{FF2B5EF4-FFF2-40B4-BE49-F238E27FC236}">
-                    <a16:creationId xmlns:a16="http://schemas.microsoft.com/office/drawing/2014/main" id="{BCD15FBC-EC5C-565D-1139-4846A036AD70}"/>
-                  </a:ext>
-                </a:extLst>
-              </p:cNvPr>
-              <p:cNvSpPr txBox="1"/>
-              <p:nvPr/>
-            </p:nvSpPr>
-            <p:spPr>
-              <a:xfrm>
-                <a:off x="8077200" y="4240923"/>
-                <a:ext cx="1301439" cy="588579"/>
-              </a:xfrm>
-              <a:prstGeom prst="rect">
-                <a:avLst/>
-              </a:prstGeom>
-              <a:solidFill>
-                <a:schemeClr val="bg1">
-                  <a:lumMod val="65000"/>
-                </a:schemeClr>
-              </a:solidFill>
-            </p:spPr>
-            <p:txBody>
-              <a:bodyPr wrap="square" rtlCol="0">
-                <a:spAutoFit/>
-              </a:bodyPr>
-              <a:lstStyle/>
-              <a:p>
-                <a:endParaRPr lang="en-US" dirty="0"/>
+                <a:r>
+                  <a:rPr lang="en-US" sz="4800" dirty="0">
+                    <a:ln w="0"/>
+                    <a:solidFill>
+                      <a:schemeClr val="bg1"/>
+                    </a:solidFill>
+                    <a:effectLst>
+                      <a:outerShdw blurRad="38100" dist="25400" dir="5400000" algn="ctr" rotWithShape="0">
+                        <a:srgbClr val="6E747A">
+                          <a:alpha val="43000"/>
+                        </a:srgbClr>
+                      </a:outerShdw>
+                    </a:effectLst>
+                    <a:latin typeface="Apple Chancery" panose="03020702040506060504" pitchFamily="66" charset="-79"/>
+                    <a:cs typeface="Apple Chancery" panose="03020702040506060504" pitchFamily="66" charset="-79"/>
+                  </a:rPr>
+                  <a:t>Numeracy</a:t>
+                </a:r>
               </a:p>
             </p:txBody>
           </p:sp>
         </p:grpSp>
+        <p:pic>
+          <p:nvPicPr>
+            <p:cNvPr id="8" name="Picture 7" descr="Logo&#10;&#10;Description automatically generated">
+              <a:extLst>
+                <a:ext uri="{FF2B5EF4-FFF2-40B4-BE49-F238E27FC236}">
+                  <a16:creationId xmlns:a16="http://schemas.microsoft.com/office/drawing/2014/main" id="{AB585442-4024-C95C-6EBD-CBB5A2407924}"/>
+                </a:ext>
+              </a:extLst>
+            </p:cNvPr>
+            <p:cNvPicPr>
+              <a:picLocks noChangeAspect="1"/>
+            </p:cNvPicPr>
+            <p:nvPr/>
+          </p:nvPicPr>
+          <p:blipFill rotWithShape="1">
+            <a:blip r:embed="rId2"/>
+            <a:srcRect l="68157" t="30215" r="9721" b="30900"/>
+            <a:stretch/>
+          </p:blipFill>
+          <p:spPr>
+            <a:xfrm>
+              <a:off x="7735713" y="2372492"/>
+              <a:ext cx="1719385" cy="2114568"/>
+            </a:xfrm>
+            <a:prstGeom prst="rect">
+              <a:avLst/>
+            </a:prstGeom>
+          </p:spPr>
+        </p:pic>
+      </p:grpSp>
+    </p:spTree>
+    <p:extLst>
+      <p:ext uri="{BB962C8B-B14F-4D97-AF65-F5344CB8AC3E}">
+        <p14:creationId xmlns:p14="http://schemas.microsoft.com/office/powerpoint/2010/main" val="3869677343"/>
+      </p:ext>
+    </p:extLst>
+  </p:cSld>
+  <p:clrMapOvr>
+    <a:masterClrMapping/>
+  </p:clrMapOvr>
+</p:sld>
+</file>
+
+<file path=ppt/slides/slide3.xml><?xml version="1.0" encoding="utf-8"?>
+<p:sld xmlns:a="http://schemas.openxmlformats.org/drawingml/2006/main" xmlns:r="http://schemas.openxmlformats.org/officeDocument/2006/relationships" xmlns:p="http://schemas.openxmlformats.org/presentationml/2006/main">
+  <p:cSld>
+    <p:spTree>
+      <p:nvGrpSpPr>
+        <p:cNvPr id="1" name=""/>
+        <p:cNvGrpSpPr/>
+        <p:nvPr/>
+      </p:nvGrpSpPr>
+      <p:grpSpPr>
+        <a:xfrm>
+          <a:off x="0" y="0"/>
+          <a:ext cx="0" cy="0"/>
+          <a:chOff x="0" y="0"/>
+          <a:chExt cx="0" cy="0"/>
+        </a:xfrm>
+      </p:grpSpPr>
+      <p:sp>
+        <p:nvSpPr>
+          <p:cNvPr id="2" name="TextBox 1">
+            <a:extLst>
+              <a:ext uri="{FF2B5EF4-FFF2-40B4-BE49-F238E27FC236}">
+                <a16:creationId xmlns:a16="http://schemas.microsoft.com/office/drawing/2014/main" id="{940D8ACC-0FB8-2528-14F9-6BCD566D7970}"/>
+              </a:ext>
+            </a:extLst>
+          </p:cNvPr>
+          <p:cNvSpPr txBox="1"/>
+          <p:nvPr/>
+        </p:nvSpPr>
+        <p:spPr>
+          <a:xfrm>
+            <a:off x="6623361" y="4088524"/>
+            <a:ext cx="1301439" cy="588579"/>
+          </a:xfrm>
+          <a:prstGeom prst="rect">
+            <a:avLst/>
+          </a:prstGeom>
+          <a:noFill/>
+        </p:spPr>
+        <p:txBody>
+          <a:bodyPr wrap="square" rtlCol="0">
+            <a:spAutoFit/>
+          </a:bodyPr>
+          <a:lstStyle/>
+          <a:p>
+            <a:endParaRPr lang="en-US" dirty="0"/>
+          </a:p>
+        </p:txBody>
+      </p:sp>
+      <p:grpSp>
+        <p:nvGrpSpPr>
+          <p:cNvPr id="12" name="Group 11">
+            <a:extLst>
+              <a:ext uri="{FF2B5EF4-FFF2-40B4-BE49-F238E27FC236}">
+                <a16:creationId xmlns:a16="http://schemas.microsoft.com/office/drawing/2014/main" id="{C42AEB62-7212-E0CC-1D82-910425582F60}"/>
+              </a:ext>
+            </a:extLst>
+          </p:cNvPr>
+          <p:cNvGrpSpPr/>
+          <p:nvPr/>
+        </p:nvGrpSpPr>
+        <p:grpSpPr>
+          <a:xfrm>
+            <a:off x="3503071" y="2878191"/>
+            <a:ext cx="4131137" cy="1327018"/>
+            <a:chOff x="7012390" y="4107724"/>
+            <a:chExt cx="4131137" cy="1327018"/>
+          </a:xfrm>
+        </p:grpSpPr>
         <p:sp>
           <p:nvSpPr>
             <p:cNvPr id="7" name="TextBox 6">
@@ -3874,8 +4057,8 @@
           </p:nvSpPr>
           <p:spPr>
             <a:xfrm>
-              <a:off x="6872922" y="4815474"/>
-              <a:ext cx="4028302" cy="830997"/>
+              <a:off x="7012390" y="4487060"/>
+              <a:ext cx="4131137" cy="830997"/>
             </a:xfrm>
             <a:prstGeom prst="rect">
               <a:avLst/>
@@ -3892,7 +4075,7 @@
                 <a:rPr lang="en-US" sz="4800" dirty="0">
                   <a:ln w="0"/>
                   <a:solidFill>
-                    <a:schemeClr val="bg1"/>
+                    <a:srgbClr val="FF0000"/>
                   </a:solidFill>
                   <a:effectLst>
                     <a:outerShdw blurRad="38100" dist="25400" dir="5400000" algn="ctr" rotWithShape="0">
@@ -3909,11 +4092,40 @@
             </a:p>
           </p:txBody>
         </p:sp>
+        <p:pic>
+          <p:nvPicPr>
+            <p:cNvPr id="8" name="Picture 7" descr="Logo&#10;&#10;Description automatically generated">
+              <a:extLst>
+                <a:ext uri="{FF2B5EF4-FFF2-40B4-BE49-F238E27FC236}">
+                  <a16:creationId xmlns:a16="http://schemas.microsoft.com/office/drawing/2014/main" id="{AB585442-4024-C95C-6EBD-CBB5A2407924}"/>
+                </a:ext>
+              </a:extLst>
+            </p:cNvPr>
+            <p:cNvPicPr>
+              <a:picLocks noChangeAspect="1"/>
+            </p:cNvPicPr>
+            <p:nvPr/>
+          </p:nvPicPr>
+          <p:blipFill rotWithShape="1">
+            <a:blip r:embed="rId2"/>
+            <a:srcRect l="68157" t="30215" r="9721" b="30900"/>
+            <a:stretch/>
+          </p:blipFill>
+          <p:spPr>
+            <a:xfrm>
+              <a:off x="9996617" y="4107724"/>
+              <a:ext cx="1079017" cy="1327018"/>
+            </a:xfrm>
+            <a:prstGeom prst="rect">
+              <a:avLst/>
+            </a:prstGeom>
+          </p:spPr>
+        </p:pic>
       </p:grpSp>
     </p:spTree>
     <p:extLst>
       <p:ext uri="{BB962C8B-B14F-4D97-AF65-F5344CB8AC3E}">
-        <p14:creationId xmlns:p14="http://schemas.microsoft.com/office/powerpoint/2010/main" val="3869677343"/>
+        <p14:creationId xmlns:p14="http://schemas.microsoft.com/office/powerpoint/2010/main" val="3729044054"/>
       </p:ext>
     </p:extLst>
   </p:cSld>

--- a/logo.pptx
+++ b/logo.pptx
@@ -8,6 +8,7 @@
     <p:sldId id="256" r:id="rId2"/>
     <p:sldId id="257" r:id="rId3"/>
     <p:sldId id="258" r:id="rId4"/>
+    <p:sldId id="259" r:id="rId5"/>
   </p:sldIdLst>
   <p:sldSz cx="12192000" cy="6858000"/>
   <p:notesSz cx="6858000" cy="9144000"/>
@@ -117,7 +118,7 @@
 <file path=ppt/revisionInfo.xml><?xml version="1.0" encoding="utf-8"?>
 <p1510:revInfo xmlns:a="http://schemas.openxmlformats.org/drawingml/2006/main" xmlns:r="http://schemas.openxmlformats.org/officeDocument/2006/relationships" xmlns:p1510="http://schemas.microsoft.com/office/powerpoint/2015/10/main">
   <p1510:revLst>
-    <p1510:client id="{454A10BE-C021-F04C-8006-266134D92D80}" v="9" dt="2022-11-05T12:46:32.955"/>
+    <p1510:client id="{454A10BE-C021-F04C-8006-266134D92D80}" v="11" dt="2022-11-10T09:09:28.382"/>
   </p1510:revLst>
 </p1510:revInfo>
 </file>
@@ -127,7 +128,7 @@
   <pc:docChgLst>
     <pc:chgData name="Daryanto, Ahmad" userId="61940c2a-8427-4576-9f17-0c8fab086415" providerId="ADAL" clId="{454A10BE-C021-F04C-8006-266134D92D80}"/>
     <pc:docChg chg="undo custSel addSld modSld">
-      <pc:chgData name="Daryanto, Ahmad" userId="61940c2a-8427-4576-9f17-0c8fab086415" providerId="ADAL" clId="{454A10BE-C021-F04C-8006-266134D92D80}" dt="2022-11-05T12:48:58.597" v="45" actId="1076"/>
+      <pc:chgData name="Daryanto, Ahmad" userId="61940c2a-8427-4576-9f17-0c8fab086415" providerId="ADAL" clId="{454A10BE-C021-F04C-8006-266134D92D80}" dt="2022-11-10T09:09:50.706" v="53" actId="1076"/>
       <pc:docMkLst>
         <pc:docMk/>
       </pc:docMkLst>
@@ -241,6 +242,37 @@
           </ac:grpSpMkLst>
         </pc:grpChg>
       </pc:sldChg>
+      <pc:sldChg chg="addSp modSp new mod">
+        <pc:chgData name="Daryanto, Ahmad" userId="61940c2a-8427-4576-9f17-0c8fab086415" providerId="ADAL" clId="{454A10BE-C021-F04C-8006-266134D92D80}" dt="2022-11-10T09:09:50.706" v="53" actId="1076"/>
+        <pc:sldMkLst>
+          <pc:docMk/>
+          <pc:sldMk cId="1045716434" sldId="259"/>
+        </pc:sldMkLst>
+        <pc:grpChg chg="add mod">
+          <ac:chgData name="Daryanto, Ahmad" userId="61940c2a-8427-4576-9f17-0c8fab086415" providerId="ADAL" clId="{454A10BE-C021-F04C-8006-266134D92D80}" dt="2022-11-10T09:09:50.706" v="53" actId="1076"/>
+          <ac:grpSpMkLst>
+            <pc:docMk/>
+            <pc:sldMk cId="1045716434" sldId="259"/>
+            <ac:grpSpMk id="4" creationId="{07EF7E43-D33A-6CA4-E694-96811D808F26}"/>
+          </ac:grpSpMkLst>
+        </pc:grpChg>
+        <pc:picChg chg="add mod">
+          <ac:chgData name="Daryanto, Ahmad" userId="61940c2a-8427-4576-9f17-0c8fab086415" providerId="ADAL" clId="{454A10BE-C021-F04C-8006-266134D92D80}" dt="2022-11-10T09:09:09.807" v="48" actId="14100"/>
+          <ac:picMkLst>
+            <pc:docMk/>
+            <pc:sldMk cId="1045716434" sldId="259"/>
+            <ac:picMk id="2" creationId="{2F7EDFA2-6B54-068B-8AF7-720D1FB3F82B}"/>
+          </ac:picMkLst>
+        </pc:picChg>
+        <pc:picChg chg="add mod">
+          <ac:chgData name="Daryanto, Ahmad" userId="61940c2a-8427-4576-9f17-0c8fab086415" providerId="ADAL" clId="{454A10BE-C021-F04C-8006-266134D92D80}" dt="2022-11-10T09:09:33.410" v="51" actId="14100"/>
+          <ac:picMkLst>
+            <pc:docMk/>
+            <pc:sldMk cId="1045716434" sldId="259"/>
+            <ac:picMk id="3" creationId="{B9089978-522F-69C7-B5F5-EC30BCC80260}"/>
+          </ac:picMkLst>
+        </pc:picChg>
+      </pc:sldChg>
     </pc:docChg>
   </pc:docChgLst>
 </pc:chgInfo>
@@ -395,7 +427,7 @@
           <a:p>
             <a:fld id="{70508A58-EBBD-6F4C-84C4-349B94FCD322}" type="datetimeFigureOut">
               <a:rPr lang="en-US" smtClean="0"/>
-              <a:t>11/9/22</a:t>
+              <a:t>11/10/22</a:t>
             </a:fld>
             <a:endParaRPr lang="en-US"/>
           </a:p>
@@ -595,7 +627,7 @@
           <a:p>
             <a:fld id="{70508A58-EBBD-6F4C-84C4-349B94FCD322}" type="datetimeFigureOut">
               <a:rPr lang="en-US" smtClean="0"/>
-              <a:t>11/9/22</a:t>
+              <a:t>11/10/22</a:t>
             </a:fld>
             <a:endParaRPr lang="en-US"/>
           </a:p>
@@ -805,7 +837,7 @@
           <a:p>
             <a:fld id="{70508A58-EBBD-6F4C-84C4-349B94FCD322}" type="datetimeFigureOut">
               <a:rPr lang="en-US" smtClean="0"/>
-              <a:t>11/9/22</a:t>
+              <a:t>11/10/22</a:t>
             </a:fld>
             <a:endParaRPr lang="en-US"/>
           </a:p>
@@ -1005,7 +1037,7 @@
           <a:p>
             <a:fld id="{70508A58-EBBD-6F4C-84C4-349B94FCD322}" type="datetimeFigureOut">
               <a:rPr lang="en-US" smtClean="0"/>
-              <a:t>11/9/22</a:t>
+              <a:t>11/10/22</a:t>
             </a:fld>
             <a:endParaRPr lang="en-US"/>
           </a:p>
@@ -1281,7 +1313,7 @@
           <a:p>
             <a:fld id="{70508A58-EBBD-6F4C-84C4-349B94FCD322}" type="datetimeFigureOut">
               <a:rPr lang="en-US" smtClean="0"/>
-              <a:t>11/9/22</a:t>
+              <a:t>11/10/22</a:t>
             </a:fld>
             <a:endParaRPr lang="en-US"/>
           </a:p>
@@ -1549,7 +1581,7 @@
           <a:p>
             <a:fld id="{70508A58-EBBD-6F4C-84C4-349B94FCD322}" type="datetimeFigureOut">
               <a:rPr lang="en-US" smtClean="0"/>
-              <a:t>11/9/22</a:t>
+              <a:t>11/10/22</a:t>
             </a:fld>
             <a:endParaRPr lang="en-US"/>
           </a:p>
@@ -1964,7 +1996,7 @@
           <a:p>
             <a:fld id="{70508A58-EBBD-6F4C-84C4-349B94FCD322}" type="datetimeFigureOut">
               <a:rPr lang="en-US" smtClean="0"/>
-              <a:t>11/9/22</a:t>
+              <a:t>11/10/22</a:t>
             </a:fld>
             <a:endParaRPr lang="en-US"/>
           </a:p>
@@ -2106,7 +2138,7 @@
           <a:p>
             <a:fld id="{70508A58-EBBD-6F4C-84C4-349B94FCD322}" type="datetimeFigureOut">
               <a:rPr lang="en-US" smtClean="0"/>
-              <a:t>11/9/22</a:t>
+              <a:t>11/10/22</a:t>
             </a:fld>
             <a:endParaRPr lang="en-US"/>
           </a:p>
@@ -2219,7 +2251,7 @@
           <a:p>
             <a:fld id="{70508A58-EBBD-6F4C-84C4-349B94FCD322}" type="datetimeFigureOut">
               <a:rPr lang="en-US" smtClean="0"/>
-              <a:t>11/9/22</a:t>
+              <a:t>11/10/22</a:t>
             </a:fld>
             <a:endParaRPr lang="en-US"/>
           </a:p>
@@ -2532,7 +2564,7 @@
           <a:p>
             <a:fld id="{70508A58-EBBD-6F4C-84C4-349B94FCD322}" type="datetimeFigureOut">
               <a:rPr lang="en-US" smtClean="0"/>
-              <a:t>11/9/22</a:t>
+              <a:t>11/10/22</a:t>
             </a:fld>
             <a:endParaRPr lang="en-US"/>
           </a:p>
@@ -2821,7 +2853,7 @@
           <a:p>
             <a:fld id="{70508A58-EBBD-6F4C-84C4-349B94FCD322}" type="datetimeFigureOut">
               <a:rPr lang="en-US" smtClean="0"/>
-              <a:t>11/9/22</a:t>
+              <a:t>11/10/22</a:t>
             </a:fld>
             <a:endParaRPr lang="en-US"/>
           </a:p>
@@ -3064,7 +3096,7 @@
           <a:p>
             <a:fld id="{70508A58-EBBD-6F4C-84C4-349B94FCD322}" type="datetimeFigureOut">
               <a:rPr lang="en-US" smtClean="0"/>
-              <a:t>11/9/22</a:t>
+              <a:t>11/10/22</a:t>
             </a:fld>
             <a:endParaRPr lang="en-US"/>
           </a:p>
@@ -4135,6 +4167,117 @@
 </p:sld>
 </file>
 
+<file path=ppt/slides/slide4.xml><?xml version="1.0" encoding="utf-8"?>
+<p:sld xmlns:a="http://schemas.openxmlformats.org/drawingml/2006/main" xmlns:r="http://schemas.openxmlformats.org/officeDocument/2006/relationships" xmlns:p="http://schemas.openxmlformats.org/presentationml/2006/main">
+  <p:cSld>
+    <p:spTree>
+      <p:nvGrpSpPr>
+        <p:cNvPr id="1" name=""/>
+        <p:cNvGrpSpPr/>
+        <p:nvPr/>
+      </p:nvGrpSpPr>
+      <p:grpSpPr>
+        <a:xfrm>
+          <a:off x="0" y="0"/>
+          <a:ext cx="0" cy="0"/>
+          <a:chOff x="0" y="0"/>
+          <a:chExt cx="0" cy="0"/>
+        </a:xfrm>
+      </p:grpSpPr>
+      <p:grpSp>
+        <p:nvGrpSpPr>
+          <p:cNvPr id="4" name="Group 3">
+            <a:extLst>
+              <a:ext uri="{FF2B5EF4-FFF2-40B4-BE49-F238E27FC236}">
+                <a16:creationId xmlns:a16="http://schemas.microsoft.com/office/drawing/2014/main" id="{07EF7E43-D33A-6CA4-E694-96811D808F26}"/>
+              </a:ext>
+            </a:extLst>
+          </p:cNvPr>
+          <p:cNvGrpSpPr/>
+          <p:nvPr/>
+        </p:nvGrpSpPr>
+        <p:grpSpPr>
+          <a:xfrm>
+            <a:off x="4345609" y="1057361"/>
+            <a:ext cx="3500781" cy="4743278"/>
+            <a:chOff x="5306668" y="1848022"/>
+            <a:chExt cx="3500781" cy="4743278"/>
+          </a:xfrm>
+        </p:grpSpPr>
+        <p:pic>
+          <p:nvPicPr>
+            <p:cNvPr id="2" name="Picture 1">
+              <a:extLst>
+                <a:ext uri="{FF2B5EF4-FFF2-40B4-BE49-F238E27FC236}">
+                  <a16:creationId xmlns:a16="http://schemas.microsoft.com/office/drawing/2014/main" id="{2F7EDFA2-6B54-068B-8AF7-720D1FB3F82B}"/>
+                </a:ext>
+              </a:extLst>
+            </p:cNvPr>
+            <p:cNvPicPr>
+              <a:picLocks noChangeAspect="1"/>
+            </p:cNvPicPr>
+            <p:nvPr/>
+          </p:nvPicPr>
+          <p:blipFill>
+            <a:blip r:embed="rId2"/>
+            <a:stretch>
+              <a:fillRect/>
+            </a:stretch>
+          </p:blipFill>
+          <p:spPr>
+            <a:xfrm>
+              <a:off x="5306668" y="2508422"/>
+              <a:ext cx="3500781" cy="4082878"/>
+            </a:xfrm>
+            <a:prstGeom prst="rect">
+              <a:avLst/>
+            </a:prstGeom>
+          </p:spPr>
+        </p:pic>
+        <p:pic>
+          <p:nvPicPr>
+            <p:cNvPr id="3" name="Picture 2">
+              <a:extLst>
+                <a:ext uri="{FF2B5EF4-FFF2-40B4-BE49-F238E27FC236}">
+                  <a16:creationId xmlns:a16="http://schemas.microsoft.com/office/drawing/2014/main" id="{B9089978-522F-69C7-B5F5-EC30BCC80260}"/>
+                </a:ext>
+              </a:extLst>
+            </p:cNvPr>
+            <p:cNvPicPr>
+              <a:picLocks noChangeAspect="1"/>
+            </p:cNvPicPr>
+            <p:nvPr/>
+          </p:nvPicPr>
+          <p:blipFill>
+            <a:blip r:embed="rId3"/>
+            <a:stretch>
+              <a:fillRect/>
+            </a:stretch>
+          </p:blipFill>
+          <p:spPr>
+            <a:xfrm>
+              <a:off x="5306668" y="1848022"/>
+              <a:ext cx="3500781" cy="660400"/>
+            </a:xfrm>
+            <a:prstGeom prst="rect">
+              <a:avLst/>
+            </a:prstGeom>
+          </p:spPr>
+        </p:pic>
+      </p:grpSp>
+    </p:spTree>
+    <p:extLst>
+      <p:ext uri="{BB962C8B-B14F-4D97-AF65-F5344CB8AC3E}">
+        <p14:creationId xmlns:p14="http://schemas.microsoft.com/office/powerpoint/2010/main" val="1045716434"/>
+      </p:ext>
+    </p:extLst>
+  </p:cSld>
+  <p:clrMapOvr>
+    <a:masterClrMapping/>
+  </p:clrMapOvr>
+</p:sld>
+</file>
+
 <file path=ppt/theme/theme1.xml><?xml version="1.0" encoding="utf-8"?>
 <a:theme xmlns:a="http://schemas.openxmlformats.org/drawingml/2006/main" name="Office Theme">
   <a:themeElements>

--- a/logo.pptx
+++ b/logo.pptx
@@ -8,7 +8,8 @@
     <p:sldId id="256" r:id="rId2"/>
     <p:sldId id="257" r:id="rId3"/>
     <p:sldId id="258" r:id="rId4"/>
-    <p:sldId id="259" r:id="rId5"/>
+    <p:sldId id="260" r:id="rId5"/>
+    <p:sldId id="259" r:id="rId6"/>
   </p:sldIdLst>
   <p:sldSz cx="12192000" cy="6858000"/>
   <p:notesSz cx="6858000" cy="9144000"/>
@@ -118,7 +119,7 @@
 <file path=ppt/revisionInfo.xml><?xml version="1.0" encoding="utf-8"?>
 <p1510:revInfo xmlns:a="http://schemas.openxmlformats.org/drawingml/2006/main" xmlns:r="http://schemas.openxmlformats.org/officeDocument/2006/relationships" xmlns:p1510="http://schemas.microsoft.com/office/powerpoint/2015/10/main">
   <p1510:revLst>
-    <p1510:client id="{454A10BE-C021-F04C-8006-266134D92D80}" v="11" dt="2022-11-10T09:09:28.382"/>
+    <p1510:client id="{454A10BE-C021-F04C-8006-266134D92D80}" v="18" dt="2022-11-11T09:00:33.229"/>
   </p1510:revLst>
 </p1510:revInfo>
 </file>
@@ -128,7 +129,7 @@
   <pc:docChgLst>
     <pc:chgData name="Daryanto, Ahmad" userId="61940c2a-8427-4576-9f17-0c8fab086415" providerId="ADAL" clId="{454A10BE-C021-F04C-8006-266134D92D80}"/>
     <pc:docChg chg="undo custSel addSld modSld">
-      <pc:chgData name="Daryanto, Ahmad" userId="61940c2a-8427-4576-9f17-0c8fab086415" providerId="ADAL" clId="{454A10BE-C021-F04C-8006-266134D92D80}" dt="2022-11-10T09:09:50.706" v="53" actId="1076"/>
+      <pc:chgData name="Daryanto, Ahmad" userId="61940c2a-8427-4576-9f17-0c8fab086415" providerId="ADAL" clId="{454A10BE-C021-F04C-8006-266134D92D80}" dt="2022-11-11T09:00:46.878" v="64" actId="164"/>
       <pc:docMkLst>
         <pc:docMk/>
       </pc:docMkLst>
@@ -242,6 +243,29 @@
           </ac:grpSpMkLst>
         </pc:grpChg>
       </pc:sldChg>
+      <pc:sldChg chg="addSp delSp modSp mod">
+        <pc:chgData name="Daryanto, Ahmad" userId="61940c2a-8427-4576-9f17-0c8fab086415" providerId="ADAL" clId="{454A10BE-C021-F04C-8006-266134D92D80}" dt="2022-11-11T09:00:28.384" v="60" actId="478"/>
+        <pc:sldMkLst>
+          <pc:docMk/>
+          <pc:sldMk cId="3729044054" sldId="258"/>
+        </pc:sldMkLst>
+        <pc:grpChg chg="mod">
+          <ac:chgData name="Daryanto, Ahmad" userId="61940c2a-8427-4576-9f17-0c8fab086415" providerId="ADAL" clId="{454A10BE-C021-F04C-8006-266134D92D80}" dt="2022-11-11T09:00:14.899" v="57" actId="1076"/>
+          <ac:grpSpMkLst>
+            <pc:docMk/>
+            <pc:sldMk cId="3729044054" sldId="258"/>
+            <ac:grpSpMk id="12" creationId="{C42AEB62-7212-E0CC-1D82-910425582F60}"/>
+          </ac:grpSpMkLst>
+        </pc:grpChg>
+        <pc:picChg chg="add del mod">
+          <ac:chgData name="Daryanto, Ahmad" userId="61940c2a-8427-4576-9f17-0c8fab086415" providerId="ADAL" clId="{454A10BE-C021-F04C-8006-266134D92D80}" dt="2022-11-11T09:00:28.384" v="60" actId="478"/>
+          <ac:picMkLst>
+            <pc:docMk/>
+            <pc:sldMk cId="3729044054" sldId="258"/>
+            <ac:picMk id="1026" creationId="{C0BA1968-77F0-49A8-96E5-D5B4C2291556}"/>
+          </ac:picMkLst>
+        </pc:picChg>
+      </pc:sldChg>
       <pc:sldChg chg="addSp modSp new mod">
         <pc:chgData name="Daryanto, Ahmad" userId="61940c2a-8427-4576-9f17-0c8fab086415" providerId="ADAL" clId="{454A10BE-C021-F04C-8006-266134D92D80}" dt="2022-11-10T09:09:50.706" v="53" actId="1076"/>
         <pc:sldMkLst>
@@ -273,6 +297,37 @@
           </ac:picMkLst>
         </pc:picChg>
       </pc:sldChg>
+      <pc:sldChg chg="addSp delSp modSp add mod">
+        <pc:chgData name="Daryanto, Ahmad" userId="61940c2a-8427-4576-9f17-0c8fab086415" providerId="ADAL" clId="{454A10BE-C021-F04C-8006-266134D92D80}" dt="2022-11-11T09:00:46.878" v="64" actId="164"/>
+        <pc:sldMkLst>
+          <pc:docMk/>
+          <pc:sldMk cId="1198783652" sldId="260"/>
+        </pc:sldMkLst>
+        <pc:spChg chg="del">
+          <ac:chgData name="Daryanto, Ahmad" userId="61940c2a-8427-4576-9f17-0c8fab086415" providerId="ADAL" clId="{454A10BE-C021-F04C-8006-266134D92D80}" dt="2022-11-11T09:00:38.679" v="63" actId="478"/>
+          <ac:spMkLst>
+            <pc:docMk/>
+            <pc:sldMk cId="1198783652" sldId="260"/>
+            <ac:spMk id="2" creationId="{940D8ACC-0FB8-2528-14F9-6BCD566D7970}"/>
+          </ac:spMkLst>
+        </pc:spChg>
+        <pc:grpChg chg="add">
+          <ac:chgData name="Daryanto, Ahmad" userId="61940c2a-8427-4576-9f17-0c8fab086415" providerId="ADAL" clId="{454A10BE-C021-F04C-8006-266134D92D80}" dt="2022-11-11T09:00:46.878" v="64" actId="164"/>
+          <ac:grpSpMkLst>
+            <pc:docMk/>
+            <pc:sldMk cId="1198783652" sldId="260"/>
+            <ac:grpSpMk id="3" creationId="{6B3D7878-0175-41D7-1D11-C643FD5C7A50}"/>
+          </ac:grpSpMkLst>
+        </pc:grpChg>
+        <pc:picChg chg="mod">
+          <ac:chgData name="Daryanto, Ahmad" userId="61940c2a-8427-4576-9f17-0c8fab086415" providerId="ADAL" clId="{454A10BE-C021-F04C-8006-266134D92D80}" dt="2022-11-11T09:00:33.228" v="62" actId="1076"/>
+          <ac:picMkLst>
+            <pc:docMk/>
+            <pc:sldMk cId="1198783652" sldId="260"/>
+            <ac:picMk id="1026" creationId="{C0BA1968-77F0-49A8-96E5-D5B4C2291556}"/>
+          </ac:picMkLst>
+        </pc:picChg>
+      </pc:sldChg>
     </pc:docChg>
   </pc:docChgLst>
 </pc:chgInfo>
@@ -427,7 +482,7 @@
           <a:p>
             <a:fld id="{70508A58-EBBD-6F4C-84C4-349B94FCD322}" type="datetimeFigureOut">
               <a:rPr lang="en-US" smtClean="0"/>
-              <a:t>11/10/22</a:t>
+              <a:t>11/11/22</a:t>
             </a:fld>
             <a:endParaRPr lang="en-US"/>
           </a:p>
@@ -627,7 +682,7 @@
           <a:p>
             <a:fld id="{70508A58-EBBD-6F4C-84C4-349B94FCD322}" type="datetimeFigureOut">
               <a:rPr lang="en-US" smtClean="0"/>
-              <a:t>11/10/22</a:t>
+              <a:t>11/11/22</a:t>
             </a:fld>
             <a:endParaRPr lang="en-US"/>
           </a:p>
@@ -837,7 +892,7 @@
           <a:p>
             <a:fld id="{70508A58-EBBD-6F4C-84C4-349B94FCD322}" type="datetimeFigureOut">
               <a:rPr lang="en-US" smtClean="0"/>
-              <a:t>11/10/22</a:t>
+              <a:t>11/11/22</a:t>
             </a:fld>
             <a:endParaRPr lang="en-US"/>
           </a:p>
@@ -1037,7 +1092,7 @@
           <a:p>
             <a:fld id="{70508A58-EBBD-6F4C-84C4-349B94FCD322}" type="datetimeFigureOut">
               <a:rPr lang="en-US" smtClean="0"/>
-              <a:t>11/10/22</a:t>
+              <a:t>11/11/22</a:t>
             </a:fld>
             <a:endParaRPr lang="en-US"/>
           </a:p>
@@ -1313,7 +1368,7 @@
           <a:p>
             <a:fld id="{70508A58-EBBD-6F4C-84C4-349B94FCD322}" type="datetimeFigureOut">
               <a:rPr lang="en-US" smtClean="0"/>
-              <a:t>11/10/22</a:t>
+              <a:t>11/11/22</a:t>
             </a:fld>
             <a:endParaRPr lang="en-US"/>
           </a:p>
@@ -1581,7 +1636,7 @@
           <a:p>
             <a:fld id="{70508A58-EBBD-6F4C-84C4-349B94FCD322}" type="datetimeFigureOut">
               <a:rPr lang="en-US" smtClean="0"/>
-              <a:t>11/10/22</a:t>
+              <a:t>11/11/22</a:t>
             </a:fld>
             <a:endParaRPr lang="en-US"/>
           </a:p>
@@ -1996,7 +2051,7 @@
           <a:p>
             <a:fld id="{70508A58-EBBD-6F4C-84C4-349B94FCD322}" type="datetimeFigureOut">
               <a:rPr lang="en-US" smtClean="0"/>
-              <a:t>11/10/22</a:t>
+              <a:t>11/11/22</a:t>
             </a:fld>
             <a:endParaRPr lang="en-US"/>
           </a:p>
@@ -2138,7 +2193,7 @@
           <a:p>
             <a:fld id="{70508A58-EBBD-6F4C-84C4-349B94FCD322}" type="datetimeFigureOut">
               <a:rPr lang="en-US" smtClean="0"/>
-              <a:t>11/10/22</a:t>
+              <a:t>11/11/22</a:t>
             </a:fld>
             <a:endParaRPr lang="en-US"/>
           </a:p>
@@ -2251,7 +2306,7 @@
           <a:p>
             <a:fld id="{70508A58-EBBD-6F4C-84C4-349B94FCD322}" type="datetimeFigureOut">
               <a:rPr lang="en-US" smtClean="0"/>
-              <a:t>11/10/22</a:t>
+              <a:t>11/11/22</a:t>
             </a:fld>
             <a:endParaRPr lang="en-US"/>
           </a:p>
@@ -2564,7 +2619,7 @@
           <a:p>
             <a:fld id="{70508A58-EBBD-6F4C-84C4-349B94FCD322}" type="datetimeFigureOut">
               <a:rPr lang="en-US" smtClean="0"/>
-              <a:t>11/10/22</a:t>
+              <a:t>11/11/22</a:t>
             </a:fld>
             <a:endParaRPr lang="en-US"/>
           </a:p>
@@ -2853,7 +2908,7 @@
           <a:p>
             <a:fld id="{70508A58-EBBD-6F4C-84C4-349B94FCD322}" type="datetimeFigureOut">
               <a:rPr lang="en-US" smtClean="0"/>
-              <a:t>11/10/22</a:t>
+              <a:t>11/11/22</a:t>
             </a:fld>
             <a:endParaRPr lang="en-US"/>
           </a:p>
@@ -3096,7 +3151,7 @@
           <a:p>
             <a:fld id="{70508A58-EBBD-6F4C-84C4-349B94FCD322}" type="datetimeFigureOut">
               <a:rPr lang="en-US" smtClean="0"/>
-              <a:t>11/10/22</a:t>
+              <a:t>11/11/22</a:t>
             </a:fld>
             <a:endParaRPr lang="en-US"/>
           </a:p>
@@ -4069,7 +4124,7 @@
         </p:nvGrpSpPr>
         <p:grpSpPr>
           <a:xfrm>
-            <a:off x="3503071" y="2878191"/>
+            <a:off x="3429498" y="1907627"/>
             <a:ext cx="4131137" cy="1327018"/>
             <a:chOff x="7012390" y="4107724"/>
             <a:chExt cx="4131137" cy="1327018"/>
@@ -4168,6 +4223,203 @@
 </file>
 
 <file path=ppt/slides/slide4.xml><?xml version="1.0" encoding="utf-8"?>
+<p:sld xmlns:a="http://schemas.openxmlformats.org/drawingml/2006/main" xmlns:r="http://schemas.openxmlformats.org/officeDocument/2006/relationships" xmlns:p="http://schemas.openxmlformats.org/presentationml/2006/main">
+  <p:cSld>
+    <p:spTree>
+      <p:nvGrpSpPr>
+        <p:cNvPr id="1" name=""/>
+        <p:cNvGrpSpPr/>
+        <p:nvPr/>
+      </p:nvGrpSpPr>
+      <p:grpSpPr>
+        <a:xfrm>
+          <a:off x="0" y="0"/>
+          <a:ext cx="0" cy="0"/>
+          <a:chOff x="0" y="0"/>
+          <a:chExt cx="0" cy="0"/>
+        </a:xfrm>
+      </p:grpSpPr>
+      <p:grpSp>
+        <p:nvGrpSpPr>
+          <p:cNvPr id="3" name="Group 2">
+            <a:extLst>
+              <a:ext uri="{FF2B5EF4-FFF2-40B4-BE49-F238E27FC236}">
+                <a16:creationId xmlns:a16="http://schemas.microsoft.com/office/drawing/2014/main" id="{6B3D7878-0175-41D7-1D11-C643FD5C7A50}"/>
+              </a:ext>
+            </a:extLst>
+          </p:cNvPr>
+          <p:cNvGrpSpPr/>
+          <p:nvPr/>
+        </p:nvGrpSpPr>
+        <p:grpSpPr>
+          <a:xfrm>
+            <a:off x="3429498" y="1907627"/>
+            <a:ext cx="4131137" cy="4095871"/>
+            <a:chOff x="3429498" y="1907627"/>
+            <a:chExt cx="4131137" cy="4095871"/>
+          </a:xfrm>
+        </p:grpSpPr>
+        <p:grpSp>
+          <p:nvGrpSpPr>
+            <p:cNvPr id="12" name="Group 11">
+              <a:extLst>
+                <a:ext uri="{FF2B5EF4-FFF2-40B4-BE49-F238E27FC236}">
+                  <a16:creationId xmlns:a16="http://schemas.microsoft.com/office/drawing/2014/main" id="{C42AEB62-7212-E0CC-1D82-910425582F60}"/>
+                </a:ext>
+              </a:extLst>
+            </p:cNvPr>
+            <p:cNvGrpSpPr/>
+            <p:nvPr/>
+          </p:nvGrpSpPr>
+          <p:grpSpPr>
+            <a:xfrm>
+              <a:off x="3429498" y="1907627"/>
+              <a:ext cx="4131137" cy="1327018"/>
+              <a:chOff x="7012390" y="4107724"/>
+              <a:chExt cx="4131137" cy="1327018"/>
+            </a:xfrm>
+          </p:grpSpPr>
+          <p:sp>
+            <p:nvSpPr>
+              <p:cNvPr id="7" name="TextBox 6">
+                <a:extLst>
+                  <a:ext uri="{FF2B5EF4-FFF2-40B4-BE49-F238E27FC236}">
+                    <a16:creationId xmlns:a16="http://schemas.microsoft.com/office/drawing/2014/main" id="{EA0FFEE8-BAE5-EDFD-0BAE-ACEED8E5DE62}"/>
+                  </a:ext>
+                </a:extLst>
+              </p:cNvPr>
+              <p:cNvSpPr txBox="1"/>
+              <p:nvPr/>
+            </p:nvSpPr>
+            <p:spPr>
+              <a:xfrm>
+                <a:off x="7012390" y="4487060"/>
+                <a:ext cx="4131137" cy="830997"/>
+              </a:xfrm>
+              <a:prstGeom prst="rect">
+                <a:avLst/>
+              </a:prstGeom>
+              <a:noFill/>
+            </p:spPr>
+            <p:txBody>
+              <a:bodyPr wrap="square" rtlCol="0">
+                <a:spAutoFit/>
+              </a:bodyPr>
+              <a:lstStyle/>
+              <a:p>
+                <a:r>
+                  <a:rPr lang="en-US" sz="4800" dirty="0">
+                    <a:ln w="0"/>
+                    <a:solidFill>
+                      <a:srgbClr val="FF0000"/>
+                    </a:solidFill>
+                    <a:effectLst>
+                      <a:outerShdw blurRad="38100" dist="25400" dir="5400000" algn="ctr" rotWithShape="0">
+                        <a:srgbClr val="6E747A">
+                          <a:alpha val="43000"/>
+                        </a:srgbClr>
+                      </a:outerShdw>
+                    </a:effectLst>
+                    <a:latin typeface="Apple Chancery" panose="03020702040506060504" pitchFamily="66" charset="-79"/>
+                    <a:cs typeface="Apple Chancery" panose="03020702040506060504" pitchFamily="66" charset="-79"/>
+                  </a:rPr>
+                  <a:t>Numeracy</a:t>
+                </a:r>
+              </a:p>
+            </p:txBody>
+          </p:sp>
+          <p:pic>
+            <p:nvPicPr>
+              <p:cNvPr id="8" name="Picture 7" descr="Logo&#10;&#10;Description automatically generated">
+                <a:extLst>
+                  <a:ext uri="{FF2B5EF4-FFF2-40B4-BE49-F238E27FC236}">
+                    <a16:creationId xmlns:a16="http://schemas.microsoft.com/office/drawing/2014/main" id="{AB585442-4024-C95C-6EBD-CBB5A2407924}"/>
+                  </a:ext>
+                </a:extLst>
+              </p:cNvPr>
+              <p:cNvPicPr>
+                <a:picLocks noChangeAspect="1"/>
+              </p:cNvPicPr>
+              <p:nvPr/>
+            </p:nvPicPr>
+            <p:blipFill rotWithShape="1">
+              <a:blip r:embed="rId2"/>
+              <a:srcRect l="68157" t="30215" r="9721" b="30900"/>
+              <a:stretch/>
+            </p:blipFill>
+            <p:spPr>
+              <a:xfrm>
+                <a:off x="9996617" y="4107724"/>
+                <a:ext cx="1079017" cy="1327018"/>
+              </a:xfrm>
+              <a:prstGeom prst="rect">
+                <a:avLst/>
+              </a:prstGeom>
+            </p:spPr>
+          </p:pic>
+        </p:grpSp>
+        <p:pic>
+          <p:nvPicPr>
+            <p:cNvPr id="1026" name="Picture 2" descr="Free Stock Photo of Under Construction Sign Shows Partially Insufficient  Construct | Download Free Images and Free Illustrations">
+              <a:extLst>
+                <a:ext uri="{FF2B5EF4-FFF2-40B4-BE49-F238E27FC236}">
+                  <a16:creationId xmlns:a16="http://schemas.microsoft.com/office/drawing/2014/main" id="{C0BA1968-77F0-49A8-96E5-D5B4C2291556}"/>
+                </a:ext>
+              </a:extLst>
+            </p:cNvPr>
+            <p:cNvPicPr>
+              <a:picLocks noChangeAspect="1" noChangeArrowheads="1"/>
+            </p:cNvPicPr>
+            <p:nvPr/>
+          </p:nvPicPr>
+          <p:blipFill>
+            <a:blip r:embed="rId3">
+              <a:extLst>
+                <a:ext uri="{28A0092B-C50C-407E-A947-70E740481C1C}">
+                  <a14:useLocalDpi xmlns:a14="http://schemas.microsoft.com/office/drawing/2010/main" val="0"/>
+                </a:ext>
+              </a:extLst>
+            </a:blip>
+            <a:srcRect/>
+            <a:stretch>
+              <a:fillRect/>
+            </a:stretch>
+          </p:blipFill>
+          <p:spPr bwMode="auto">
+            <a:xfrm>
+              <a:off x="3725310" y="3350707"/>
+              <a:ext cx="3539511" cy="2652791"/>
+            </a:xfrm>
+            <a:prstGeom prst="rect">
+              <a:avLst/>
+            </a:prstGeom>
+            <a:noFill/>
+            <a:extLst>
+              <a:ext uri="{909E8E84-426E-40DD-AFC4-6F175D3DCCD1}">
+                <a14:hiddenFill xmlns:a14="http://schemas.microsoft.com/office/drawing/2010/main">
+                  <a:solidFill>
+                    <a:srgbClr val="FFFFFF"/>
+                  </a:solidFill>
+                </a14:hiddenFill>
+              </a:ext>
+            </a:extLst>
+          </p:spPr>
+        </p:pic>
+      </p:grpSp>
+    </p:spTree>
+    <p:extLst>
+      <p:ext uri="{BB962C8B-B14F-4D97-AF65-F5344CB8AC3E}">
+        <p14:creationId xmlns:p14="http://schemas.microsoft.com/office/powerpoint/2010/main" val="1198783652"/>
+      </p:ext>
+    </p:extLst>
+  </p:cSld>
+  <p:clrMapOvr>
+    <a:masterClrMapping/>
+  </p:clrMapOvr>
+</p:sld>
+</file>
+
+<file path=ppt/slides/slide5.xml><?xml version="1.0" encoding="utf-8"?>
 <p:sld xmlns:a="http://schemas.openxmlformats.org/drawingml/2006/main" xmlns:r="http://schemas.openxmlformats.org/officeDocument/2006/relationships" xmlns:p="http://schemas.openxmlformats.org/presentationml/2006/main">
   <p:cSld>
     <p:spTree>
